--- a/curriculum/M01/W06/L03/slides.pptx
+++ b/curriculum/M01/W06/L03/slides.pptx
@@ -5501,7 +5501,7 @@
               </a:spcAft>
             </a:pPr>
             <a:r>
-              <a:rPr sz="1600" b="1" i="0">
+              <a:rPr sz="1400" b="1" i="0">
                 <a:solidFill>
                   <a:srgbClr val="F2B705"/>
                 </a:solidFill>
@@ -5512,81 +5512,37 @@
               <a:t>•  </a:t>
             </a:r>
             <a:r>
-              <a:rPr sz="1600" b="0" i="0">
-                <a:solidFill>
-                  <a:srgbClr val="11202B"/>
-                </a:solidFill>
-                <a:latin typeface="Malgun Gothic"/>
-                <a:ea typeface="Malgun Gothic"/>
-                <a:cs typeface="Malgun Gothic"/>
-              </a:rPr>
-              <a:t>복제는 이중나선이 풀리는 </a:t>
-            </a:r>
-            <a:r>
-              <a:rPr sz="1600" b="1" i="0">
-                <a:solidFill>
-                  <a:srgbClr val="11202B"/>
-                </a:solidFill>
-                <a:latin typeface="Malgun Gothic"/>
-                <a:ea typeface="Malgun Gothic"/>
-                <a:cs typeface="Malgun Gothic"/>
-              </a:rPr>
-              <a:t>복제 분기점(replication fork)</a:t>
-            </a:r>
-            <a:r>
-              <a:rPr sz="1600" b="0" i="0">
-                <a:solidFill>
-                  <a:srgbClr val="11202B"/>
-                </a:solidFill>
-                <a:latin typeface="Malgun Gothic"/>
-                <a:ea typeface="Malgun Gothic"/>
-                <a:cs typeface="Malgun Gothic"/>
-              </a:rPr>
-              <a:t>에서 일어난다. 두 주형 가닥은 방향이 반대이므로 분기점이 한 방향으로 전진할 때 한 가닥은 분기점이 가는 방향과 같은 방향으로 합성되고, 다른 가닥은 반대 방향으로 합성되어야 한다. 앞의 것이 </a:t>
-            </a:r>
-            <a:r>
-              <a:rPr sz="1600" b="1" i="0">
-                <a:solidFill>
-                  <a:srgbClr val="11202B"/>
-                </a:solidFill>
-                <a:latin typeface="Malgun Gothic"/>
-                <a:ea typeface="Malgun Gothic"/>
-                <a:cs typeface="Malgun Gothic"/>
-              </a:rPr>
-              <a:t>leading 가닥</a:t>
-            </a:r>
-            <a:r>
-              <a:rPr sz="1600" b="0" i="0">
-                <a:solidFill>
-                  <a:srgbClr val="11202B"/>
-                </a:solidFill>
-                <a:latin typeface="Malgun Gothic"/>
-                <a:ea typeface="Malgun Gothic"/>
-                <a:cs typeface="Malgun Gothic"/>
-              </a:rPr>
-              <a:t>으로 끊김 없이 이어지고, 뒤의 것이 </a:t>
-            </a:r>
-            <a:r>
-              <a:rPr sz="1600" b="1" i="0">
-                <a:solidFill>
-                  <a:srgbClr val="11202B"/>
-                </a:solidFill>
-                <a:latin typeface="Malgun Gothic"/>
-                <a:ea typeface="Malgun Gothic"/>
-                <a:cs typeface="Malgun Gothic"/>
-              </a:rPr>
-              <a:t>lagging 가닥</a:t>
-            </a:r>
-            <a:r>
-              <a:rPr sz="1600" b="0" i="0">
-                <a:solidFill>
-                  <a:srgbClr val="11202B"/>
-                </a:solidFill>
-                <a:latin typeface="Malgun Gothic"/>
-                <a:ea typeface="Malgun Gothic"/>
-                <a:cs typeface="Malgun Gothic"/>
-              </a:rPr>
-              <a:t>으로 짧은 토막을 반복해 만든 뒤 이어 붙인다.</a:t>
+              <a:rPr sz="1400" b="0" i="0">
+                <a:solidFill>
+                  <a:srgbClr val="11202B"/>
+                </a:solidFill>
+                <a:latin typeface="Malgun Gothic"/>
+                <a:ea typeface="Malgun Gothic"/>
+                <a:cs typeface="Malgun Gothic"/>
+              </a:rPr>
+              <a:t>앞 절에서 polymerase의 성질 세 가지를 보았다. 5′→3′ 한 방향으로만 합성하고, 시작할 3′ 말단이 있어야 하며, 주형을 따른다는 것이다. 그런데 두 주형 가닥은 서로 반대 방향으로 놓여 있다. </a:t>
+            </a:r>
+            <a:r>
+              <a:rPr sz="1400" b="1" i="0">
+                <a:solidFill>
+                  <a:srgbClr val="11202B"/>
+                </a:solidFill>
+                <a:latin typeface="Malgun Gothic"/>
+                <a:ea typeface="Malgun Gothic"/>
+                <a:cs typeface="Malgun Gothic"/>
+              </a:rPr>
+              <a:t>한 방향으로만 만들 수 있는 효소가 반대 방향의 두 가닥을 동시에 어떻게 처리하는가.</a:t>
+            </a:r>
+            <a:r>
+              <a:rPr sz="1400" b="0" i="0">
+                <a:solidFill>
+                  <a:srgbClr val="11202B"/>
+                </a:solidFill>
+                <a:latin typeface="Malgun Gothic"/>
+                <a:ea typeface="Malgun Gothic"/>
+                <a:cs typeface="Malgun Gothic"/>
+              </a:rPr>
+              <a:t> 이 절은 그 모순처럼 보이는 문제를 세포가 어떻게 푸는지를 다룬다.</a:t>
             </a:r>
           </a:p>
           <a:p>
@@ -5596,7 +5552,7 @@
               </a:spcAft>
             </a:pPr>
             <a:r>
-              <a:rPr sz="1600" b="1" i="0">
+              <a:rPr sz="1400" b="1" i="0">
                 <a:solidFill>
                   <a:srgbClr val="F2B705"/>
                 </a:solidFill>
@@ -5607,37 +5563,81 @@
               <a:t>•  </a:t>
             </a:r>
             <a:r>
-              <a:rPr sz="1600" b="0" i="0">
-                <a:solidFill>
-                  <a:srgbClr val="11202B"/>
-                </a:solidFill>
-                <a:latin typeface="Malgun Gothic"/>
-                <a:ea typeface="Malgun Gothic"/>
-                <a:cs typeface="Malgun Gothic"/>
-              </a:rPr>
-              <a:t>이 토막은 1968년 Okazaki 등이 확인했다. *E. coli*에 방사성 thymidine을 아주 짧게 공급하고 DNA를 변성시켜 크기별로 분리하면, 표지가 먼저 짧은 조각(세균에서 1,000~2,000 뉴클레오타이드)에 들어가고 시간이 지나면서 긴 사슬로 옮겨 갔다. 이 조각이 </a:t>
-            </a:r>
-            <a:r>
-              <a:rPr sz="1600" b="1" i="0">
-                <a:solidFill>
-                  <a:srgbClr val="11202B"/>
-                </a:solidFill>
-                <a:latin typeface="Malgun Gothic"/>
-                <a:ea typeface="Malgun Gothic"/>
-                <a:cs typeface="Malgun Gothic"/>
-              </a:rPr>
-              <a:t>Okazaki 토막</a:t>
-            </a:r>
-            <a:r>
-              <a:rPr sz="1600" b="0" i="0">
-                <a:solidFill>
-                  <a:srgbClr val="11202B"/>
-                </a:solidFill>
-                <a:latin typeface="Malgun Gothic"/>
-                <a:ea typeface="Malgun Gothic"/>
-                <a:cs typeface="Malgun Gothic"/>
-              </a:rPr>
-              <a:t>이고 진핵세포에서는 100~200 뉴클레오타이드로 더 짧다. 진핵세포의 토막이 짧은 이유는 nucleosome 반복 주기와 대응하는 것으로 본다.</a:t>
+              <a:rPr sz="1400" b="0" i="0">
+                <a:solidFill>
+                  <a:srgbClr val="11202B"/>
+                </a:solidFill>
+                <a:latin typeface="Malgun Gothic"/>
+                <a:ea typeface="Malgun Gothic"/>
+                <a:cs typeface="Malgun Gothic"/>
+              </a:rPr>
+              <a:t>복제는 이중나선이 풀리는 </a:t>
+            </a:r>
+            <a:r>
+              <a:rPr sz="1400" b="1" i="0">
+                <a:solidFill>
+                  <a:srgbClr val="11202B"/>
+                </a:solidFill>
+                <a:latin typeface="Malgun Gothic"/>
+                <a:ea typeface="Malgun Gothic"/>
+                <a:cs typeface="Malgun Gothic"/>
+              </a:rPr>
+              <a:t>복제 분기점(replication fork)</a:t>
+            </a:r>
+            <a:r>
+              <a:rPr sz="1400" b="0" i="0">
+                <a:solidFill>
+                  <a:srgbClr val="11202B"/>
+                </a:solidFill>
+                <a:latin typeface="Malgun Gothic"/>
+                <a:ea typeface="Malgun Gothic"/>
+                <a:cs typeface="Malgun Gothic"/>
+              </a:rPr>
+              <a:t>에서 일어난다. 두 주형 가닥은 방향이 반대이므로 분기점이 한 방향으로 전진할 때 한 가닥은 분기점이 가는 방향과 같은 방향으로 합성되고, 다른 가닥은 반대 방향으로 합성되어야 한다. 앞의 것이 </a:t>
+            </a:r>
+            <a:r>
+              <a:rPr sz="1400" b="1" i="0">
+                <a:solidFill>
+                  <a:srgbClr val="11202B"/>
+                </a:solidFill>
+                <a:latin typeface="Malgun Gothic"/>
+                <a:ea typeface="Malgun Gothic"/>
+                <a:cs typeface="Malgun Gothic"/>
+              </a:rPr>
+              <a:t>leading 가닥</a:t>
+            </a:r>
+            <a:r>
+              <a:rPr sz="1400" b="0" i="0">
+                <a:solidFill>
+                  <a:srgbClr val="11202B"/>
+                </a:solidFill>
+                <a:latin typeface="Malgun Gothic"/>
+                <a:ea typeface="Malgun Gothic"/>
+                <a:cs typeface="Malgun Gothic"/>
+              </a:rPr>
+              <a:t>으로 끊김 없이 이어지고, 뒤의 것이 </a:t>
+            </a:r>
+            <a:r>
+              <a:rPr sz="1400" b="1" i="0">
+                <a:solidFill>
+                  <a:srgbClr val="11202B"/>
+                </a:solidFill>
+                <a:latin typeface="Malgun Gothic"/>
+                <a:ea typeface="Malgun Gothic"/>
+                <a:cs typeface="Malgun Gothic"/>
+              </a:rPr>
+              <a:t>lagging 가닥</a:t>
+            </a:r>
+            <a:r>
+              <a:rPr sz="1400" b="0" i="0">
+                <a:solidFill>
+                  <a:srgbClr val="11202B"/>
+                </a:solidFill>
+                <a:latin typeface="Malgun Gothic"/>
+                <a:ea typeface="Malgun Gothic"/>
+                <a:cs typeface="Malgun Gothic"/>
+              </a:rPr>
+              <a:t>으로 짧은 토막을 반복해 만든 뒤 이어 붙인다.</a:t>
             </a:r>
           </a:p>
           <a:p>
@@ -5647,7 +5647,7 @@
               </a:spcAft>
             </a:pPr>
             <a:r>
-              <a:rPr sz="1600" b="1" i="0">
+              <a:rPr sz="1400" b="1" i="0">
                 <a:solidFill>
                   <a:srgbClr val="F2B705"/>
                 </a:solidFill>
@@ -5658,7 +5658,58 @@
               <a:t>•  </a:t>
             </a:r>
             <a:r>
-              <a:rPr sz="1600" b="0" i="0">
+              <a:rPr sz="1400" b="0" i="0">
+                <a:solidFill>
+                  <a:srgbClr val="11202B"/>
+                </a:solidFill>
+                <a:latin typeface="Malgun Gothic"/>
+                <a:ea typeface="Malgun Gothic"/>
+                <a:cs typeface="Malgun Gothic"/>
+              </a:rPr>
+              <a:t>이 토막은 1968년 Okazaki 등이 확인했다. *E. coli*에 방사성 thymidine을 아주 짧게 공급하고 DNA를 변성시켜 크기별로 분리하면, 표지가 먼저 짧은 조각(세균에서 1,000~2,000 뉴클레오타이드)에 들어가고 시간이 지나면서 긴 사슬로 옮겨 갔다. 이 조각이 </a:t>
+            </a:r>
+            <a:r>
+              <a:rPr sz="1400" b="1" i="0">
+                <a:solidFill>
+                  <a:srgbClr val="11202B"/>
+                </a:solidFill>
+                <a:latin typeface="Malgun Gothic"/>
+                <a:ea typeface="Malgun Gothic"/>
+                <a:cs typeface="Malgun Gothic"/>
+              </a:rPr>
+              <a:t>Okazaki 토막</a:t>
+            </a:r>
+            <a:r>
+              <a:rPr sz="1400" b="0" i="0">
+                <a:solidFill>
+                  <a:srgbClr val="11202B"/>
+                </a:solidFill>
+                <a:latin typeface="Malgun Gothic"/>
+                <a:ea typeface="Malgun Gothic"/>
+                <a:cs typeface="Malgun Gothic"/>
+              </a:rPr>
+              <a:t>이고 진핵세포에서는 100~200 뉴클레오타이드로 더 짧다. 진핵세포의 토막이 짧은 이유는 nucleosome 반복 주기와 대응하는 것으로 본다.</a:t>
+            </a:r>
+          </a:p>
+          <a:p>
+            <a:pPr>
+              <a:spcAft>
+                <a:spcPts val="900"/>
+              </a:spcAft>
+            </a:pPr>
+            <a:r>
+              <a:rPr sz="1400" b="1" i="0">
+                <a:solidFill>
+                  <a:srgbClr val="F2B705"/>
+                </a:solidFill>
+                <a:latin typeface="Malgun Gothic"/>
+                <a:ea typeface="Malgun Gothic"/>
+                <a:cs typeface="Malgun Gothic"/>
+              </a:rPr>
+              <a:t>•  </a:t>
+            </a:r>
+            <a:r>
+              <a:rPr sz="1400" b="0" i="0">
                 <a:solidFill>
                   <a:srgbClr val="11202B"/>
                 </a:solidFill>
@@ -8064,7 +8115,7 @@
               </a:spcAft>
             </a:pPr>
             <a:r>
-              <a:rPr sz="1600" b="1" i="0">
+              <a:rPr sz="1400" b="1" i="0">
                 <a:solidFill>
                   <a:srgbClr val="F2B705"/>
                 </a:solidFill>
@@ -8075,15 +8126,37 @@
               <a:t>•  </a:t>
             </a:r>
             <a:r>
-              <a:rPr sz="1600" b="0" i="0">
-                <a:solidFill>
-                  <a:srgbClr val="11202B"/>
-                </a:solidFill>
-                <a:latin typeface="Malgun Gothic"/>
-                <a:ea typeface="Malgun Gothic"/>
-                <a:cs typeface="Malgun Gothic"/>
-              </a:rPr>
-              <a:t>사람 유전체는 복제 한 번에 약 6×109 염기쌍을 합성한다. 분열마다 유전자에 변이가 쌓이지 않으려면 오류율이 극히 낮아야 한다. 측정된 전체 오류율은 염기 109~1010개당 1개 수준이다. 이 값은 한 단계로 얻어지지 않고 세 단계가 곱해져 나온다.</a:t>
+              <a:rPr sz="1400" b="0" i="0">
+                <a:solidFill>
+                  <a:srgbClr val="11202B"/>
+                </a:solidFill>
+                <a:latin typeface="Malgun Gothic"/>
+                <a:ea typeface="Malgun Gothic"/>
+                <a:cs typeface="Malgun Gothic"/>
+              </a:rPr>
+              <a:t>앞 절까지로 두 가닥이 어떻게 만들어지는지는 보았다. 그런데 만들어지기만 해서는 안 되고 정확해야 한다. 들어가며에서 말했듯 복제의 실수는 지워지지 않고 모든 자손 세포로 전달된다. </a:t>
+            </a:r>
+            <a:r>
+              <a:rPr sz="1400" b="1" i="0">
+                <a:solidFill>
+                  <a:srgbClr val="11202B"/>
+                </a:solidFill>
+                <a:latin typeface="Malgun Gothic"/>
+                <a:ea typeface="Malgun Gothic"/>
+                <a:cs typeface="Malgun Gothic"/>
+              </a:rPr>
+              <a:t>그 정확도는 어느 정도이고, 무엇이 그것을 만드는가.</a:t>
+            </a:r>
+            <a:r>
+              <a:rPr sz="1400" b="0" i="0">
+                <a:solidFill>
+                  <a:srgbClr val="11202B"/>
+                </a:solidFill>
+                <a:latin typeface="Malgun Gothic"/>
+                <a:ea typeface="Malgun Gothic"/>
+                <a:cs typeface="Malgun Gothic"/>
+              </a:rPr>
+              <a:t> 이 절은 한 효소의 성질이 아니라 여러 단계가 곱해져 정확도가 만들어진다는 것을 보인다.</a:t>
             </a:r>
           </a:p>
           <a:p>
@@ -8093,7 +8166,7 @@
               </a:spcAft>
             </a:pPr>
             <a:r>
-              <a:rPr sz="1600" b="1" i="0">
+              <a:rPr sz="1400" b="1" i="0">
                 <a:solidFill>
                   <a:srgbClr val="F2B705"/>
                 </a:solidFill>
@@ -8104,26 +8177,15 @@
               <a:t>•  </a:t>
             </a:r>
             <a:r>
-              <a:rPr sz="1600" b="1" i="0">
-                <a:solidFill>
-                  <a:srgbClr val="11202B"/>
-                </a:solidFill>
-                <a:latin typeface="Malgun Gothic"/>
-                <a:ea typeface="Malgun Gothic"/>
-                <a:cs typeface="Malgun Gothic"/>
-              </a:rPr>
-              <a:t>염기 선택</a:t>
-            </a:r>
-            <a:r>
-              <a:rPr sz="1600" b="0" i="0">
-                <a:solidFill>
-                  <a:srgbClr val="11202B"/>
-                </a:solidFill>
-                <a:latin typeface="Malgun Gothic"/>
-                <a:ea typeface="Malgun Gothic"/>
-                <a:cs typeface="Malgun Gothic"/>
-              </a:rPr>
-              <a:t> polymerase의 활성 부위는 올바른 염기쌍의 기하 구조에만 맞는다. 잘못된 염기가 들어오면 다음 뉴클레오타이드를 붙이는 반응이 느려진다. 이 단계만으로 오류율은 약 10-5이다.</a:t>
+              <a:rPr sz="1400" b="0" i="0">
+                <a:solidFill>
+                  <a:srgbClr val="11202B"/>
+                </a:solidFill>
+                <a:latin typeface="Malgun Gothic"/>
+                <a:ea typeface="Malgun Gothic"/>
+                <a:cs typeface="Malgun Gothic"/>
+              </a:rPr>
+              <a:t>사람 유전체는 복제 한 번에 약 6×109 염기쌍을 합성한다. 분열마다 유전자에 변이가 쌓이지 않으려면 오류율이 극히 낮아야 한다. 측정된 전체 오류율은 염기 109~1010개당 1개 수준이다. 이 값은 한 단계로 얻어지지 않고 세 단계가 곱해져 나온다.</a:t>
             </a:r>
           </a:p>
           <a:p>
@@ -8133,7 +8195,7 @@
               </a:spcAft>
             </a:pPr>
             <a:r>
-              <a:rPr sz="1600" b="1" i="0">
+              <a:rPr sz="1400" b="1" i="0">
                 <a:solidFill>
                   <a:srgbClr val="F2B705"/>
                 </a:solidFill>
@@ -8144,26 +8206,26 @@
               <a:t>•  </a:t>
             </a:r>
             <a:r>
-              <a:rPr sz="1600" b="1" i="0">
-                <a:solidFill>
-                  <a:srgbClr val="11202B"/>
-                </a:solidFill>
-                <a:latin typeface="Malgun Gothic"/>
-                <a:ea typeface="Malgun Gothic"/>
-                <a:cs typeface="Malgun Gothic"/>
-              </a:rPr>
-              <a:t>Proofreading</a:t>
-            </a:r>
-            <a:r>
-              <a:rPr sz="1600" b="0" i="0">
-                <a:solidFill>
-                  <a:srgbClr val="11202B"/>
-                </a:solidFill>
-                <a:latin typeface="Malgun Gothic"/>
-                <a:ea typeface="Malgun Gothic"/>
-                <a:cs typeface="Malgun Gothic"/>
-              </a:rPr>
-              <a:t> 대부분의 복제용 polymerase는 3′→5′ exonuclease 활성을 함께 가진다. 짝이 맞지 않은 3′ 말단은 활성 부위에서 흔들리므로 합성이 멈추고, exonuclease 활성이 그 뉴클레오타이드를 떼어낸다. 이 단계가 오류율을 약 100배 낮춰 10-7로 만든다.</a:t>
+              <a:rPr sz="1400" b="1" i="0">
+                <a:solidFill>
+                  <a:srgbClr val="11202B"/>
+                </a:solidFill>
+                <a:latin typeface="Malgun Gothic"/>
+                <a:ea typeface="Malgun Gothic"/>
+                <a:cs typeface="Malgun Gothic"/>
+              </a:rPr>
+              <a:t>염기 선택</a:t>
+            </a:r>
+            <a:r>
+              <a:rPr sz="1400" b="0" i="0">
+                <a:solidFill>
+                  <a:srgbClr val="11202B"/>
+                </a:solidFill>
+                <a:latin typeface="Malgun Gothic"/>
+                <a:ea typeface="Malgun Gothic"/>
+                <a:cs typeface="Malgun Gothic"/>
+              </a:rPr>
+              <a:t> polymerase의 활성 부위는 올바른 염기쌍의 기하 구조에만 맞는다. 잘못된 염기가 들어오면 다음 뉴클레오타이드를 붙이는 반응이 느려진다. 이 단계만으로 오류율은 약 10-5이다.</a:t>
             </a:r>
           </a:p>
           <a:p>
@@ -8173,7 +8235,7 @@
               </a:spcAft>
             </a:pPr>
             <a:r>
-              <a:rPr sz="1600" b="1" i="0">
+              <a:rPr sz="1400" b="1" i="0">
                 <a:solidFill>
                   <a:srgbClr val="F2B705"/>
                 </a:solidFill>
@@ -8184,7 +8246,47 @@
               <a:t>•  </a:t>
             </a:r>
             <a:r>
-              <a:rPr sz="1600" b="1" i="0">
+              <a:rPr sz="1400" b="1" i="0">
+                <a:solidFill>
+                  <a:srgbClr val="11202B"/>
+                </a:solidFill>
+                <a:latin typeface="Malgun Gothic"/>
+                <a:ea typeface="Malgun Gothic"/>
+                <a:cs typeface="Malgun Gothic"/>
+              </a:rPr>
+              <a:t>Proofreading</a:t>
+            </a:r>
+            <a:r>
+              <a:rPr sz="1400" b="0" i="0">
+                <a:solidFill>
+                  <a:srgbClr val="11202B"/>
+                </a:solidFill>
+                <a:latin typeface="Malgun Gothic"/>
+                <a:ea typeface="Malgun Gothic"/>
+                <a:cs typeface="Malgun Gothic"/>
+              </a:rPr>
+              <a:t> 대부분의 복제용 polymerase는 3′→5′ exonuclease 활성을 함께 가진다. 짝이 맞지 않은 3′ 말단은 활성 부위에서 흔들리므로 합성이 멈추고, exonuclease 활성이 그 뉴클레오타이드를 떼어낸다. 이 단계가 오류율을 약 100배 낮춰 10-7로 만든다.</a:t>
+            </a:r>
+          </a:p>
+          <a:p>
+            <a:pPr>
+              <a:spcAft>
+                <a:spcPts val="900"/>
+              </a:spcAft>
+            </a:pPr>
+            <a:r>
+              <a:rPr sz="1400" b="1" i="0">
+                <a:solidFill>
+                  <a:srgbClr val="F2B705"/>
+                </a:solidFill>
+                <a:latin typeface="Malgun Gothic"/>
+                <a:ea typeface="Malgun Gothic"/>
+                <a:cs typeface="Malgun Gothic"/>
+              </a:rPr>
+              <a:t>•  </a:t>
+            </a:r>
+            <a:r>
+              <a:rPr sz="1400" b="1" i="0">
                 <a:solidFill>
                   <a:srgbClr val="11202B"/>
                 </a:solidFill>
@@ -8195,7 +8297,7 @@
               <a:t>Mismatch repair</a:t>
             </a:r>
             <a:r>
-              <a:rPr sz="1600" b="0" i="0">
+              <a:rPr sz="1400" b="0" i="0">
                 <a:solidFill>
                   <a:srgbClr val="11202B"/>
                 </a:solidFill>
@@ -10118,6 +10220,57 @@
                 <a:ea typeface="Malgun Gothic"/>
                 <a:cs typeface="Malgun Gothic"/>
               </a:rPr>
+              <a:t>지금까지는 복제가 시작된 뒤의 이야기였다. 그런데 애초에 </a:t>
+            </a:r>
+            <a:r>
+              <a:rPr sz="1400" b="1" i="0">
+                <a:solidFill>
+                  <a:srgbClr val="11202B"/>
+                </a:solidFill>
+                <a:latin typeface="Malgun Gothic"/>
+                <a:ea typeface="Malgun Gothic"/>
+                <a:cs typeface="Malgun Gothic"/>
+              </a:rPr>
+              <a:t>어디서, 언제 시작하는가</a:t>
+            </a:r>
+            <a:r>
+              <a:rPr sz="1400" b="0" i="0">
+                <a:solidFill>
+                  <a:srgbClr val="11202B"/>
+                </a:solidFill>
+                <a:latin typeface="Malgun Gothic"/>
+                <a:ea typeface="Malgun Gothic"/>
+                <a:cs typeface="Malgun Gothic"/>
+              </a:rPr>
+              <a:t>라는 질문이 남아 있다. 이것은 사소한 문제가 아니다. 한 세포주기에 어느 구간이든 정확히 한 번만 복제되어야 하는데, 시작점이 여러 곳이면 그 보장이 어려워진다. 이 절은 시작점의 구조와 그 횟수를 제한하는 장치를 다룬다.</a:t>
+            </a:r>
+          </a:p>
+          <a:p>
+            <a:pPr>
+              <a:spcAft>
+                <a:spcPts val="900"/>
+              </a:spcAft>
+            </a:pPr>
+            <a:r>
+              <a:rPr sz="1400" b="1" i="0">
+                <a:solidFill>
+                  <a:srgbClr val="F2B705"/>
+                </a:solidFill>
+                <a:latin typeface="Malgun Gothic"/>
+                <a:ea typeface="Malgun Gothic"/>
+                <a:cs typeface="Malgun Gothic"/>
+              </a:rPr>
+              <a:t>•  </a:t>
+            </a:r>
+            <a:r>
+              <a:rPr sz="1400" b="0" i="0">
+                <a:solidFill>
+                  <a:srgbClr val="11202B"/>
+                </a:solidFill>
+                <a:latin typeface="Malgun Gothic"/>
+                <a:ea typeface="Malgun Gothic"/>
+                <a:cs typeface="Malgun Gothic"/>
+              </a:rPr>
               <a:t>복제는 아무 곳에서나 시작하지 않는다. </a:t>
             </a:r>
             <a:r>
@@ -11186,7 +11339,7 @@
               </a:spcAft>
             </a:pPr>
             <a:r>
-              <a:rPr sz="1600" b="1" i="0">
+              <a:rPr sz="1400" b="1" i="0">
                 <a:solidFill>
                   <a:srgbClr val="F2B705"/>
                 </a:solidFill>
@@ -11197,15 +11350,37 @@
               <a:t>•  </a:t>
             </a:r>
             <a:r>
-              <a:rPr sz="1600" b="0" i="0">
-                <a:solidFill>
-                  <a:srgbClr val="11202B"/>
-                </a:solidFill>
-                <a:latin typeface="Malgun Gothic"/>
-                <a:ea typeface="Malgun Gothic"/>
-                <a:cs typeface="Malgun Gothic"/>
-              </a:rPr>
-              <a:t>선형 염색체의 말단에는 polymerase의 두 가지 제약이 그대로 문제로 드러난다. Lagging 가닥 주형의 맨 끝에서 마지막 RNA primer가 제거되면 그 자리를 메울 3′ 말단이 없다. 그 결과 복제마다 말단이 짧아진다. 사람의 체세포에서 측정된 단축은 분열마다 50~100 bp다.</a:t>
+              <a:rPr sz="1400" b="0" i="0">
+                <a:solidFill>
+                  <a:srgbClr val="11202B"/>
+                </a:solidFill>
+                <a:latin typeface="Malgun Gothic"/>
+                <a:ea typeface="Malgun Gothic"/>
+                <a:cs typeface="Malgun Gothic"/>
+              </a:rPr>
+              <a:t>앞 절들에서 복제의 기전과 조절을 보았다. 그런데 그 기전을 선형 염색체의 </a:t>
+            </a:r>
+            <a:r>
+              <a:rPr sz="1400" b="1" i="0">
+                <a:solidFill>
+                  <a:srgbClr val="11202B"/>
+                </a:solidFill>
+                <a:latin typeface="Malgun Gothic"/>
+                <a:ea typeface="Malgun Gothic"/>
+                <a:cs typeface="Malgun Gothic"/>
+              </a:rPr>
+              <a:t>맨 끝</a:t>
+            </a:r>
+            <a:r>
+              <a:rPr sz="1400" b="0" i="0">
+                <a:solidFill>
+                  <a:srgbClr val="11202B"/>
+                </a:solidFill>
+                <a:latin typeface="Malgun Gothic"/>
+                <a:ea typeface="Malgun Gothic"/>
+                <a:cs typeface="Malgun Gothic"/>
+              </a:rPr>
+              <a:t>에 적용해 보면 풀리지 않는 문제가 하나 남는다. Primer가 있어야 시작할 수 있다는 성질과, 그 primer를 결국 제거해야 한다는 사실이 끝에서 충돌하기 때문이다. 이 절은 그 충돌이 무엇이고 세포가 어떻게 대응하는지를 다룬다.</a:t>
             </a:r>
           </a:p>
           <a:p>
@@ -11215,7 +11390,7 @@
               </a:spcAft>
             </a:pPr>
             <a:r>
-              <a:rPr sz="1600" b="1" i="0">
+              <a:rPr sz="1400" b="1" i="0">
                 <a:solidFill>
                   <a:srgbClr val="F2B705"/>
                 </a:solidFill>
@@ -11226,7 +11401,36 @@
               <a:t>•  </a:t>
             </a:r>
             <a:r>
-              <a:rPr sz="1600" b="0" i="0">
+              <a:rPr sz="1400" b="0" i="0">
+                <a:solidFill>
+                  <a:srgbClr val="11202B"/>
+                </a:solidFill>
+                <a:latin typeface="Malgun Gothic"/>
+                <a:ea typeface="Malgun Gothic"/>
+                <a:cs typeface="Malgun Gothic"/>
+              </a:rPr>
+              <a:t>선형 염색체의 말단에는 polymerase의 두 가지 제약이 그대로 문제로 드러난다. Lagging 가닥 주형의 맨 끝에서 마지막 RNA primer가 제거되면 그 자리를 메울 3′ 말단이 없다. 그 결과 복제마다 말단이 짧아진다. 사람의 체세포에서 측정된 단축은 분열마다 50~100 bp다.</a:t>
+            </a:r>
+          </a:p>
+          <a:p>
+            <a:pPr>
+              <a:spcAft>
+                <a:spcPts val="900"/>
+              </a:spcAft>
+            </a:pPr>
+            <a:r>
+              <a:rPr sz="1400" b="1" i="0">
+                <a:solidFill>
+                  <a:srgbClr val="F2B705"/>
+                </a:solidFill>
+                <a:latin typeface="Malgun Gothic"/>
+                <a:ea typeface="Malgun Gothic"/>
+                <a:cs typeface="Malgun Gothic"/>
+              </a:rPr>
+              <a:t>•  </a:t>
+            </a:r>
+            <a:r>
+              <a:rPr sz="1400" b="0" i="0">
                 <a:solidFill>
                   <a:srgbClr val="11202B"/>
                 </a:solidFill>
@@ -11237,7 +11441,7 @@
               <a:t>사람의 telomere는 TTAGGG 6염기 반복이 수 kb에서 15 kb 이어지고 3′ 쪽이 단일가닥으로 돌출되어 있다. 이 반복을 다시 늘리는 효소가 </a:t>
             </a:r>
             <a:r>
-              <a:rPr sz="1600" b="1" i="0">
+              <a:rPr sz="1400" b="1" i="0">
                 <a:solidFill>
                   <a:srgbClr val="11202B"/>
                 </a:solidFill>
@@ -11248,7 +11452,7 @@
               <a:t>telomerase</a:t>
             </a:r>
             <a:r>
-              <a:rPr sz="1600" b="0" i="0">
+              <a:rPr sz="1400" b="0" i="0">
                 <a:solidFill>
                   <a:srgbClr val="11202B"/>
                 </a:solidFill>
@@ -11259,7 +11463,7 @@
               <a:t>다. Telomerase는 단백질 subunit TERT와 RNA subunit TERC로 이루어지며, </a:t>
             </a:r>
             <a:r>
-              <a:rPr sz="1600" b="1" i="0">
+              <a:rPr sz="1400" b="1" i="0">
                 <a:solidFill>
                   <a:srgbClr val="11202B"/>
                 </a:solidFill>
@@ -11270,7 +11474,7 @@
               <a:t>자기 주형을 가지고 다니는 reverse transcriptase</a:t>
             </a:r>
             <a:r>
-              <a:rPr sz="1600" b="0" i="0">
+              <a:rPr sz="1400" b="0" i="0">
                 <a:solidFill>
                   <a:srgbClr val="11202B"/>
                 </a:solidFill>
@@ -12723,6 +12927,57 @@
             <a:spAutoFit/>
           </a:bodyPr>
           <a:lstStyle/>
+          <a:p>
+            <a:pPr>
+              <a:spcAft>
+                <a:spcPts val="900"/>
+              </a:spcAft>
+            </a:pPr>
+            <a:r>
+              <a:rPr sz="1400" b="1" i="0">
+                <a:solidFill>
+                  <a:srgbClr val="F2B705"/>
+                </a:solidFill>
+                <a:latin typeface="Malgun Gothic"/>
+                <a:ea typeface="Malgun Gothic"/>
+                <a:cs typeface="Malgun Gothic"/>
+              </a:rPr>
+              <a:t>•  </a:t>
+            </a:r>
+            <a:r>
+              <a:rPr sz="1400" b="0" i="0">
+                <a:solidFill>
+                  <a:srgbClr val="11202B"/>
+                </a:solidFill>
+                <a:latin typeface="Malgun Gothic"/>
+                <a:ea typeface="Malgun Gothic"/>
+                <a:cs typeface="Malgun Gothic"/>
+              </a:rPr>
+              <a:t>여기까지가 복제 쪽 이야기였다. 그런데 유전체를 지키는 일은 정확히 복제하는 것만으로 끝나지 않는다. </a:t>
+            </a:r>
+            <a:r>
+              <a:rPr sz="1400" b="1" i="0">
+                <a:solidFill>
+                  <a:srgbClr val="11202B"/>
+                </a:solidFill>
+                <a:latin typeface="Malgun Gothic"/>
+                <a:ea typeface="Malgun Gothic"/>
+                <a:cs typeface="Malgun Gothic"/>
+              </a:rPr>
+              <a:t>복제를 하지 않는 동안에도 DNA는 계속 망가진다.</a:t>
+            </a:r>
+            <a:r>
+              <a:rPr sz="1400" b="0" i="0">
+                <a:solidFill>
+                  <a:srgbClr val="11202B"/>
+                </a:solidFill>
+                <a:latin typeface="Malgun Gothic"/>
+                <a:ea typeface="Malgun Gothic"/>
+                <a:cs typeface="Malgun Gothic"/>
+              </a:rPr>
+              <a:t> 외부 요인이 없어도 화학적으로 저절로 변하는 염기가 있고, 세포는 그것을 끊임없이 찾아 고쳐야 한다. 이 절부터 복구 쪽으로 넘어간다.</a:t>
+            </a:r>
+          </a:p>
           <a:p>
             <a:pPr>
               <a:spcAft>
@@ -15554,7 +15809,7 @@
               </a:spcAft>
             </a:pPr>
             <a:r>
-              <a:rPr sz="1800" b="1" i="0">
+              <a:rPr sz="1600" b="1" i="0">
                 <a:solidFill>
                   <a:srgbClr val="F2B705"/>
                 </a:solidFill>
@@ -15565,7 +15820,58 @@
               <a:t>•  </a:t>
             </a:r>
             <a:r>
-              <a:rPr sz="1800" b="0" i="0">
+              <a:rPr sz="1600" b="0" i="0">
+                <a:solidFill>
+                  <a:srgbClr val="11202B"/>
+                </a:solidFill>
+                <a:latin typeface="Malgun Gothic"/>
+                <a:ea typeface="Malgun Gothic"/>
+                <a:cs typeface="Malgun Gothic"/>
+              </a:rPr>
+              <a:t>앞 절의 복구 경로들은 손상된 염기를 떼어내고 반대 가닥을 주형으로 다시 채우는 방식이었다. 그 방식이 통하려면 </a:t>
+            </a:r>
+            <a:r>
+              <a:rPr sz="1600" b="1" i="0">
+                <a:solidFill>
+                  <a:srgbClr val="11202B"/>
+                </a:solidFill>
+                <a:latin typeface="Malgun Gothic"/>
+                <a:ea typeface="Malgun Gothic"/>
+                <a:cs typeface="Malgun Gothic"/>
+              </a:rPr>
+              <a:t>반대 가닥이 멀쩡해야 한다.</a:t>
+            </a:r>
+            <a:r>
+              <a:rPr sz="1600" b="0" i="0">
+                <a:solidFill>
+                  <a:srgbClr val="11202B"/>
+                </a:solidFill>
+                <a:latin typeface="Malgun Gothic"/>
+                <a:ea typeface="Malgun Gothic"/>
+                <a:cs typeface="Malgun Gothic"/>
+              </a:rPr>
+              <a:t> 그런데 두 가닥이 함께 끊어지면 베낄 주형이 그 자리에 없고, 복제 중에 손상을 만나면 고칠 시간도 없다. 이 절은 그 두 가지 더 어려운 경우를 다룬다.</a:t>
+            </a:r>
+          </a:p>
+          <a:p>
+            <a:pPr>
+              <a:spcAft>
+                <a:spcPts val="900"/>
+              </a:spcAft>
+            </a:pPr>
+            <a:r>
+              <a:rPr sz="1600" b="1" i="0">
+                <a:solidFill>
+                  <a:srgbClr val="F2B705"/>
+                </a:solidFill>
+                <a:latin typeface="Malgun Gothic"/>
+                <a:ea typeface="Malgun Gothic"/>
+                <a:cs typeface="Malgun Gothic"/>
+              </a:rPr>
+              <a:t>•  </a:t>
+            </a:r>
+            <a:r>
+              <a:rPr sz="1600" b="0" i="0">
                 <a:solidFill>
                   <a:srgbClr val="11202B"/>
                 </a:solidFill>
@@ -15576,7 +15882,7 @@
               <a:t>복제가 시작되기 전에 손상이 모두 제거되지 않으면 분기점이 손상 부위에서 멈춘다. 멈춘 분기점이 그대로 무너지면 가닥이 끊어진다. 세포는 정확도를 희생하고 합성을 계속하는 경로를 쓴다. </a:t>
             </a:r>
             <a:r>
-              <a:rPr sz="1800" b="1" i="0">
+              <a:rPr sz="1600" b="1" i="0">
                 <a:solidFill>
                   <a:srgbClr val="11202B"/>
                 </a:solidFill>
@@ -15587,7 +15893,7 @@
               <a:t>Translesion DNA synthesis</a:t>
             </a:r>
             <a:r>
-              <a:rPr sz="1800" b="0" i="0">
+              <a:rPr sz="1600" b="0" i="0">
                 <a:solidFill>
                   <a:srgbClr val="11202B"/>
                 </a:solidFill>
@@ -18856,7 +19162,7 @@
               </a:spcAft>
             </a:pPr>
             <a:r>
-              <a:rPr sz="1600" b="1" i="0">
+              <a:rPr sz="1400" b="1" i="0">
                 <a:solidFill>
                   <a:srgbClr val="F2B705"/>
                 </a:solidFill>
@@ -18867,37 +19173,37 @@
               <a:t>•  </a:t>
             </a:r>
             <a:r>
-              <a:rPr sz="1600" b="0" i="0">
-                <a:solidFill>
-                  <a:srgbClr val="11202B"/>
-                </a:solidFill>
-                <a:latin typeface="Malgun Gothic"/>
-                <a:ea typeface="Malgun Gothic"/>
-                <a:cs typeface="Malgun Gothic"/>
-              </a:rPr>
-              <a:t>유전체는 정확히 유지되지만 완전히 고정된 것은 아니다. 일부 재배열은 손상의 결과가 아니라 </a:t>
-            </a:r>
-            <a:r>
-              <a:rPr sz="1600" b="1" i="0">
-                <a:solidFill>
-                  <a:srgbClr val="11202B"/>
-                </a:solidFill>
-                <a:latin typeface="Malgun Gothic"/>
-                <a:ea typeface="Malgun Gothic"/>
-                <a:cs typeface="Malgun Gothic"/>
-              </a:rPr>
-              <a:t>발생 과정에 프로그램된 정상 과정</a:t>
-            </a:r>
-            <a:r>
-              <a:rPr sz="1600" b="0" i="0">
-                <a:solidFill>
-                  <a:srgbClr val="11202B"/>
-                </a:solidFill>
-                <a:latin typeface="Malgun Gothic"/>
-                <a:ea typeface="Malgun Gothic"/>
-                <a:cs typeface="Malgun Gothic"/>
-              </a:rPr>
-              <a:t>이다. 척추동물의 면역글로불린과 T cell receptor 유전자가 대표 예다.</a:t>
+              <a:rPr sz="1400" b="0" i="0">
+                <a:solidFill>
+                  <a:srgbClr val="11202B"/>
+                </a:solidFill>
+                <a:latin typeface="Malgun Gothic"/>
+                <a:ea typeface="Malgun Gothic"/>
+                <a:cs typeface="Malgun Gothic"/>
+              </a:rPr>
+              <a:t>지금까지는 유전체를 </a:t>
+            </a:r>
+            <a:r>
+              <a:rPr sz="1400" b="1" i="0">
+                <a:solidFill>
+                  <a:srgbClr val="11202B"/>
+                </a:solidFill>
+                <a:latin typeface="Malgun Gothic"/>
+                <a:ea typeface="Malgun Gothic"/>
+                <a:cs typeface="Malgun Gothic"/>
+              </a:rPr>
+              <a:t>그대로 지키는</a:t>
+            </a:r>
+            <a:r>
+              <a:rPr sz="1400" b="0" i="0">
+                <a:solidFill>
+                  <a:srgbClr val="11202B"/>
+                </a:solidFill>
+                <a:latin typeface="Malgun Gothic"/>
+                <a:ea typeface="Malgun Gothic"/>
+                <a:cs typeface="Malgun Gothic"/>
+              </a:rPr>
+              <a:t> 쪽만 보았다. 그런데 세포가 유전체를 일부러 바꾸는 경우도 있다. 그것도 사고가 아니라 정해진 프로그램으로 바꾼다. 면역계가 수많은 항원을 알아보는 능력이 바로 그런 의도된 재배열에서 나온다. 이 절은 그 예외처럼 보이는 정상 과정을 다룬다.</a:t>
             </a:r>
           </a:p>
           <a:p>
@@ -18907,7 +19213,7 @@
               </a:spcAft>
             </a:pPr>
             <a:r>
-              <a:rPr sz="1600" b="1" i="0">
+              <a:rPr sz="1400" b="1" i="0">
                 <a:solidFill>
                   <a:srgbClr val="F2B705"/>
                 </a:solidFill>
@@ -18918,7 +19224,58 @@
               <a:t>•  </a:t>
             </a:r>
             <a:r>
-              <a:rPr sz="1600" b="0" i="0">
+              <a:rPr sz="1400" b="0" i="0">
+                <a:solidFill>
+                  <a:srgbClr val="11202B"/>
+                </a:solidFill>
+                <a:latin typeface="Malgun Gothic"/>
+                <a:ea typeface="Malgun Gothic"/>
+                <a:cs typeface="Malgun Gothic"/>
+              </a:rPr>
+              <a:t>유전체는 정확히 유지되지만 완전히 고정된 것은 아니다. 일부 재배열은 손상의 결과가 아니라 </a:t>
+            </a:r>
+            <a:r>
+              <a:rPr sz="1400" b="1" i="0">
+                <a:solidFill>
+                  <a:srgbClr val="11202B"/>
+                </a:solidFill>
+                <a:latin typeface="Malgun Gothic"/>
+                <a:ea typeface="Malgun Gothic"/>
+                <a:cs typeface="Malgun Gothic"/>
+              </a:rPr>
+              <a:t>발생 과정에 프로그램된 정상 과정</a:t>
+            </a:r>
+            <a:r>
+              <a:rPr sz="1400" b="0" i="0">
+                <a:solidFill>
+                  <a:srgbClr val="11202B"/>
+                </a:solidFill>
+                <a:latin typeface="Malgun Gothic"/>
+                <a:ea typeface="Malgun Gothic"/>
+                <a:cs typeface="Malgun Gothic"/>
+              </a:rPr>
+              <a:t>이다. 척추동물의 면역글로불린과 T cell receptor 유전자가 대표 예다.</a:t>
+            </a:r>
+          </a:p>
+          <a:p>
+            <a:pPr>
+              <a:spcAft>
+                <a:spcPts val="900"/>
+              </a:spcAft>
+            </a:pPr>
+            <a:r>
+              <a:rPr sz="1400" b="1" i="0">
+                <a:solidFill>
+                  <a:srgbClr val="F2B705"/>
+                </a:solidFill>
+                <a:latin typeface="Malgun Gothic"/>
+                <a:ea typeface="Malgun Gothic"/>
+                <a:cs typeface="Malgun Gothic"/>
+              </a:rPr>
+              <a:t>•  </a:t>
+            </a:r>
+            <a:r>
+              <a:rPr sz="1400" b="0" i="0">
                 <a:solidFill>
                   <a:srgbClr val="11202B"/>
                 </a:solidFill>
@@ -18929,7 +19286,7 @@
               <a:t>생식세포 유전체에는 완성된 면역글로불린 유전자가 없다. 중쇄 좌위에는 수십 개의 </a:t>
             </a:r>
             <a:r>
-              <a:rPr sz="1600" b="1" i="0">
+              <a:rPr sz="1400" b="1" i="0">
                 <a:solidFill>
                   <a:srgbClr val="11202B"/>
                 </a:solidFill>
@@ -18940,7 +19297,7 @@
               <a:t>V</a:t>
             </a:r>
             <a:r>
-              <a:rPr sz="1600" b="0" i="0">
+              <a:rPr sz="1400" b="0" i="0">
                 <a:solidFill>
                   <a:srgbClr val="11202B"/>
                 </a:solidFill>
@@ -18951,7 +19308,7 @@
               <a:t> 토막, 20여 개의 </a:t>
             </a:r>
             <a:r>
-              <a:rPr sz="1600" b="1" i="0">
+              <a:rPr sz="1400" b="1" i="0">
                 <a:solidFill>
                   <a:srgbClr val="11202B"/>
                 </a:solidFill>
@@ -18962,7 +19319,7 @@
               <a:t>D</a:t>
             </a:r>
             <a:r>
-              <a:rPr sz="1600" b="0" i="0">
+              <a:rPr sz="1400" b="0" i="0">
                 <a:solidFill>
                   <a:srgbClr val="11202B"/>
                 </a:solidFill>
@@ -18973,7 +19330,7 @@
               <a:t> 토막, 6개의 </a:t>
             </a:r>
             <a:r>
-              <a:rPr sz="1600" b="1" i="0">
+              <a:rPr sz="1400" b="1" i="0">
                 <a:solidFill>
                   <a:srgbClr val="11202B"/>
                 </a:solidFill>
@@ -18984,7 +19341,7 @@
               <a:t>J</a:t>
             </a:r>
             <a:r>
-              <a:rPr sz="1600" b="0" i="0">
+              <a:rPr sz="1400" b="0" i="0">
                 <a:solidFill>
                   <a:srgbClr val="11202B"/>
                 </a:solidFill>
@@ -18995,7 +19352,7 @@
               <a:t> 토막이 따로 늘어서 있다. B lymphocyte가 발생하는 동안 각 세포에서 V 하나, D 하나, J 하나가 선택되어 이어 붙고 그 사이의 DNA가 제거된다. 이 재배열이 </a:t>
             </a:r>
             <a:r>
-              <a:rPr sz="1600" b="1" i="0">
+              <a:rPr sz="1400" b="1" i="0">
                 <a:solidFill>
                   <a:srgbClr val="11202B"/>
                 </a:solidFill>
@@ -19006,7 +19363,7 @@
               <a:t>V(D)J recombination</a:t>
             </a:r>
             <a:r>
-              <a:rPr sz="1600" b="0" i="0">
+              <a:rPr sz="1400" b="0" i="0">
                 <a:solidFill>
                   <a:srgbClr val="11202B"/>
                 </a:solidFill>
